--- a/Template_PowerPoint/ARTS-Lab_USC_slide_template.pptx
+++ b/Template_PowerPoint/ARTS-Lab_USC_slide_template.pptx
@@ -125,12 +125,40 @@
 </p:presentation>
 </file>
 
+<file path=ppt/authors.xml><?xml version="1.0" encoding="utf-8"?>
+<p188:authorLst xmlns:a="http://schemas.openxmlformats.org/drawingml/2006/main" xmlns:r="http://schemas.openxmlformats.org/officeDocument/2006/relationships" xmlns:p188="http://schemas.microsoft.com/office/powerpoint/2018/8/main">
+  <p188:author id="{C6C367B0-5300-5B4F-3091-62559A53AA73}" name="Downey, Austin" initials="AD" userId="S::AUSTINDOWNEY@sc.edu::f266037a-302d-4e65-ae3f-08629f90d52a" providerId="AD"/>
+</p188:authorLst>
+</file>
+
 <file path=ppt/revisionInfo.xml><?xml version="1.0" encoding="utf-8"?>
 <p1510:revInfo xmlns:a="http://schemas.openxmlformats.org/drawingml/2006/main" xmlns:r="http://schemas.openxmlformats.org/officeDocument/2006/relationships" xmlns:p1510="http://schemas.microsoft.com/office/powerpoint/2015/10/main">
   <p1510:revLst>
     <p1510:client id="{BA0EA008-82DD-4DE9-8E33-4EFB8D869763}" v="66" dt="2024-06-17T18:43:59.851"/>
   </p1510:revLst>
 </p1510:revInfo>
+</file>
+
+<file path=ppt/comments/modernComment_102_C9EB5396.xml><?xml version="1.0" encoding="utf-8"?>
+<p188:cmLst xmlns:a="http://schemas.openxmlformats.org/drawingml/2006/main" xmlns:r="http://schemas.openxmlformats.org/officeDocument/2006/relationships" xmlns:p188="http://schemas.microsoft.com/office/powerpoint/2018/8/main">
+  <p188:cm id="{BC0F572B-F0EC-411F-9F73-3F08381BA155}" authorId="{C6C367B0-5300-5B4F-3091-62559A53AA73}" created="2026-08-27T20:58:00.368">
+    <ac:deMkLst xmlns:ac="http://schemas.microsoft.com/office/drawing/2013/main/command">
+      <pc:docMk xmlns:pc="http://schemas.microsoft.com/office/powerpoint/2013/main/command"/>
+      <pc:sldMk xmlns:pc="http://schemas.microsoft.com/office/powerpoint/2013/main/command" cId="3387642774" sldId="258"/>
+      <ac:picMk id="6" creationId="{7E0840F6-E49F-B367-A919-E7D2DCD72E27}"/>
+    </ac:deMkLst>
+    <p188:txBody>
+      <a:bodyPr/>
+      <a:lstStyle/>
+      <a:p>
+        <a:r>
+          <a:rPr lang="en-US"/>
+          <a:t>Here is a clean way to have a github repo, this one is to the generic lab website, but replace it with the repo(s) that are important to your project. </a:t>
+        </a:r>
+      </a:p>
+    </p188:txBody>
+  </p188:cm>
+</p188:cmLst>
 </file>
 
 <file path=ppt/handoutMasters/handoutMaster1.xml><?xml version="1.0" encoding="utf-8"?>
@@ -227,7 +255,7 @@
           <a:p>
             <a:fld id="{7D038C9C-4B69-864E-9EEE-DFA43CC144D2}" type="datetimeFigureOut">
               <a:rPr lang="en-US" smtClean="0"/>
-              <a:t>4/11/2026</a:t>
+              <a:t>8/27/2026</a:t>
             </a:fld>
             <a:endParaRPr lang="en-US"/>
           </a:p>
@@ -404,7 +432,7 @@
           <a:p>
             <a:fld id="{41D9A61E-B1D6-C34D-A321-B3E90F6DE630}" type="datetimeFigureOut">
               <a:rPr lang="en-US" smtClean="0"/>
-              <a:t>4/11/2026</a:t>
+              <a:t>8/27/2026</a:t>
             </a:fld>
             <a:endParaRPr lang="en-US"/>
           </a:p>
@@ -3228,7 +3256,7 @@
           <a:p>
             <a:r>
               <a:rPr lang="en-US" dirty="0"/>
-              <a:t>Thank You for Your Time</a:t>
+              <a:t>Discussion</a:t>
             </a:r>
           </a:p>
         </p:txBody>
@@ -3249,7 +3277,12 @@
             <p:ph type="body" idx="1"/>
           </p:nvPr>
         </p:nvSpPr>
-        <p:spPr/>
+        <p:spPr>
+          <a:xfrm>
+            <a:off x="831850" y="4867949"/>
+            <a:ext cx="5741478" cy="1500187"/>
+          </a:xfrm>
+        </p:spPr>
         <p:txBody>
           <a:bodyPr/>
           <a:lstStyle/>
@@ -3264,7 +3297,7 @@
             </a:pPr>
             <a:r>
               <a:rPr lang="en-US" dirty="0"/>
-              <a:t>Name:</a:t>
+              <a:t>Name: [The presenter’s name]</a:t>
             </a:r>
           </a:p>
           <a:p>
@@ -3278,7 +3311,7 @@
             </a:pPr>
             <a:r>
               <a:rPr lang="en-US" dirty="0"/>
-              <a:t>Title:</a:t>
+              <a:t>Title: [The presenter’s title]</a:t>
             </a:r>
           </a:p>
           <a:p>
@@ -3292,7 +3325,7 @@
             </a:pPr>
             <a:r>
               <a:rPr lang="en-US" dirty="0"/>
-              <a:t>Email:</a:t>
+              <a:t>Email: [The presenter’s email]</a:t>
             </a:r>
           </a:p>
           <a:p>
@@ -3306,8 +3339,321 @@
             </a:pPr>
             <a:r>
               <a:rPr lang="en-US" dirty="0"/>
-              <a:t>Lab GitHub: github.com/arts-laboratory</a:t>
-            </a:r>
+              <a:t>GitHub:[The presenter’s </a:t>
+            </a:r>
+            <a:r>
+              <a:rPr lang="en-US" dirty="0" err="1"/>
+              <a:t>github</a:t>
+            </a:r>
+            <a:r>
+              <a:rPr lang="en-US" dirty="0"/>
+              <a:t> or other relevant link]</a:t>
+            </a:r>
+          </a:p>
+        </p:txBody>
+      </p:sp>
+      <p:pic>
+        <p:nvPicPr>
+          <p:cNvPr id="6" name="Picture 5">
+            <a:extLst>
+              <a:ext uri="{FF2B5EF4-FFF2-40B4-BE49-F238E27FC236}">
+                <a16:creationId xmlns:a16="http://schemas.microsoft.com/office/drawing/2014/main" id="{7E0840F6-E49F-B367-A919-E7D2DCD72E27}"/>
+              </a:ext>
+            </a:extLst>
+          </p:cNvPr>
+          <p:cNvPicPr>
+            <a:picLocks noChangeAspect="1"/>
+          </p:cNvPicPr>
+          <p:nvPr/>
+        </p:nvPicPr>
+        <p:blipFill>
+          <a:blip r:embed="rId3"/>
+          <a:stretch>
+            <a:fillRect/>
+          </a:stretch>
+        </p:blipFill>
+        <p:spPr>
+          <a:xfrm>
+            <a:off x="7283317" y="2797586"/>
+            <a:ext cx="1262828" cy="1262828"/>
+          </a:xfrm>
+          <a:prstGeom prst="rect">
+            <a:avLst/>
+          </a:prstGeom>
+        </p:spPr>
+      </p:pic>
+      <p:sp>
+        <p:nvSpPr>
+          <p:cNvPr id="10" name="Text Placeholder 2">
+            <a:extLst>
+              <a:ext uri="{FF2B5EF4-FFF2-40B4-BE49-F238E27FC236}">
+                <a16:creationId xmlns:a16="http://schemas.microsoft.com/office/drawing/2014/main" id="{5F96EA1F-2A53-AE93-CC53-759D172C3E8B}"/>
+              </a:ext>
+            </a:extLst>
+          </p:cNvPr>
+          <p:cNvSpPr txBox="1">
+            <a:spLocks/>
+          </p:cNvSpPr>
+          <p:nvPr/>
+        </p:nvSpPr>
+        <p:spPr>
+          <a:xfrm>
+            <a:off x="3719808" y="2561499"/>
+            <a:ext cx="3319469" cy="1262828"/>
+          </a:xfrm>
+          <a:prstGeom prst="rect">
+            <a:avLst/>
+          </a:prstGeom>
+        </p:spPr>
+        <p:txBody>
+          <a:bodyPr vert="horz" lIns="91440" tIns="45720" rIns="91440" bIns="45720" rtlCol="0" anchor="b">
+            <a:normAutofit/>
+          </a:bodyPr>
+          <a:lstStyle>
+            <a:lvl1pPr marL="0" indent="0" algn="l" defTabSz="914400" rtl="0" eaLnBrk="1" latinLnBrk="0" hangingPunct="1">
+              <a:lnSpc>
+                <a:spcPct val="90000"/>
+              </a:lnSpc>
+              <a:spcBef>
+                <a:spcPts val="1000"/>
+              </a:spcBef>
+              <a:buFont typeface="Arial" panose="020B0604020202020204" pitchFamily="34" charset="0"/>
+              <a:buNone/>
+              <a:defRPr sz="1800" kern="1200">
+                <a:solidFill>
+                  <a:schemeClr val="bg1"/>
+                </a:solidFill>
+                <a:latin typeface="+mn-lt"/>
+                <a:ea typeface="+mn-ea"/>
+                <a:cs typeface="+mn-cs"/>
+              </a:defRPr>
+            </a:lvl1pPr>
+            <a:lvl2pPr marL="457200" indent="0" algn="l" defTabSz="914400" rtl="0" eaLnBrk="1" latinLnBrk="0" hangingPunct="1">
+              <a:lnSpc>
+                <a:spcPct val="90000"/>
+              </a:lnSpc>
+              <a:spcBef>
+                <a:spcPts val="500"/>
+              </a:spcBef>
+              <a:buFont typeface="Arial" panose="020B0604020202020204" pitchFamily="34" charset="0"/>
+              <a:buNone/>
+              <a:defRPr sz="2000" kern="1200">
+                <a:solidFill>
+                  <a:schemeClr val="tx1">
+                    <a:tint val="75000"/>
+                  </a:schemeClr>
+                </a:solidFill>
+                <a:latin typeface="+mn-lt"/>
+                <a:ea typeface="+mn-ea"/>
+                <a:cs typeface="+mn-cs"/>
+              </a:defRPr>
+            </a:lvl2pPr>
+            <a:lvl3pPr marL="914400" indent="0" algn="l" defTabSz="914400" rtl="0" eaLnBrk="1" latinLnBrk="0" hangingPunct="1">
+              <a:lnSpc>
+                <a:spcPct val="90000"/>
+              </a:lnSpc>
+              <a:spcBef>
+                <a:spcPts val="500"/>
+              </a:spcBef>
+              <a:buFont typeface="Arial" panose="020B0604020202020204" pitchFamily="34" charset="0"/>
+              <a:buNone/>
+              <a:defRPr sz="1800" kern="1200">
+                <a:solidFill>
+                  <a:schemeClr val="tx1">
+                    <a:tint val="75000"/>
+                  </a:schemeClr>
+                </a:solidFill>
+                <a:latin typeface="+mn-lt"/>
+                <a:ea typeface="+mn-ea"/>
+                <a:cs typeface="+mn-cs"/>
+              </a:defRPr>
+            </a:lvl3pPr>
+            <a:lvl4pPr marL="1371600" indent="0" algn="l" defTabSz="914400" rtl="0" eaLnBrk="1" latinLnBrk="0" hangingPunct="1">
+              <a:lnSpc>
+                <a:spcPct val="90000"/>
+              </a:lnSpc>
+              <a:spcBef>
+                <a:spcPts val="500"/>
+              </a:spcBef>
+              <a:buFont typeface="Arial" panose="020B0604020202020204" pitchFamily="34" charset="0"/>
+              <a:buNone/>
+              <a:defRPr sz="1600" kern="1200">
+                <a:solidFill>
+                  <a:schemeClr val="tx1">
+                    <a:tint val="75000"/>
+                  </a:schemeClr>
+                </a:solidFill>
+                <a:latin typeface="+mn-lt"/>
+                <a:ea typeface="+mn-ea"/>
+                <a:cs typeface="+mn-cs"/>
+              </a:defRPr>
+            </a:lvl4pPr>
+            <a:lvl5pPr marL="1828800" indent="0" algn="l" defTabSz="914400" rtl="0" eaLnBrk="1" latinLnBrk="0" hangingPunct="1">
+              <a:lnSpc>
+                <a:spcPct val="90000"/>
+              </a:lnSpc>
+              <a:spcBef>
+                <a:spcPts val="500"/>
+              </a:spcBef>
+              <a:buFont typeface="Arial" panose="020B0604020202020204" pitchFamily="34" charset="0"/>
+              <a:buNone/>
+              <a:defRPr sz="1600" kern="1200">
+                <a:solidFill>
+                  <a:schemeClr val="tx1">
+                    <a:tint val="75000"/>
+                  </a:schemeClr>
+                </a:solidFill>
+                <a:latin typeface="+mn-lt"/>
+                <a:ea typeface="+mn-ea"/>
+                <a:cs typeface="+mn-cs"/>
+              </a:defRPr>
+            </a:lvl5pPr>
+            <a:lvl6pPr marL="2286000" indent="0" algn="l" defTabSz="914400" rtl="0" eaLnBrk="1" latinLnBrk="0" hangingPunct="1">
+              <a:lnSpc>
+                <a:spcPct val="90000"/>
+              </a:lnSpc>
+              <a:spcBef>
+                <a:spcPts val="500"/>
+              </a:spcBef>
+              <a:buFont typeface="Arial" panose="020B0604020202020204" pitchFamily="34" charset="0"/>
+              <a:buNone/>
+              <a:defRPr sz="1600" kern="1200">
+                <a:solidFill>
+                  <a:schemeClr val="tx1">
+                    <a:tint val="75000"/>
+                  </a:schemeClr>
+                </a:solidFill>
+                <a:latin typeface="+mn-lt"/>
+                <a:ea typeface="+mn-ea"/>
+                <a:cs typeface="+mn-cs"/>
+              </a:defRPr>
+            </a:lvl6pPr>
+            <a:lvl7pPr marL="2743200" indent="0" algn="l" defTabSz="914400" rtl="0" eaLnBrk="1" latinLnBrk="0" hangingPunct="1">
+              <a:lnSpc>
+                <a:spcPct val="90000"/>
+              </a:lnSpc>
+              <a:spcBef>
+                <a:spcPts val="500"/>
+              </a:spcBef>
+              <a:buFont typeface="Arial" panose="020B0604020202020204" pitchFamily="34" charset="0"/>
+              <a:buNone/>
+              <a:defRPr sz="1600" kern="1200">
+                <a:solidFill>
+                  <a:schemeClr val="tx1">
+                    <a:tint val="75000"/>
+                  </a:schemeClr>
+                </a:solidFill>
+                <a:latin typeface="+mn-lt"/>
+                <a:ea typeface="+mn-ea"/>
+                <a:cs typeface="+mn-cs"/>
+              </a:defRPr>
+            </a:lvl7pPr>
+            <a:lvl8pPr marL="3200400" indent="0" algn="l" defTabSz="914400" rtl="0" eaLnBrk="1" latinLnBrk="0" hangingPunct="1">
+              <a:lnSpc>
+                <a:spcPct val="90000"/>
+              </a:lnSpc>
+              <a:spcBef>
+                <a:spcPts val="500"/>
+              </a:spcBef>
+              <a:buFont typeface="Arial" panose="020B0604020202020204" pitchFamily="34" charset="0"/>
+              <a:buNone/>
+              <a:defRPr sz="1600" kern="1200">
+                <a:solidFill>
+                  <a:schemeClr val="tx1">
+                    <a:tint val="75000"/>
+                  </a:schemeClr>
+                </a:solidFill>
+                <a:latin typeface="+mn-lt"/>
+                <a:ea typeface="+mn-ea"/>
+                <a:cs typeface="+mn-cs"/>
+              </a:defRPr>
+            </a:lvl8pPr>
+            <a:lvl9pPr marL="3657600" indent="0" algn="l" defTabSz="914400" rtl="0" eaLnBrk="1" latinLnBrk="0" hangingPunct="1">
+              <a:lnSpc>
+                <a:spcPct val="90000"/>
+              </a:lnSpc>
+              <a:spcBef>
+                <a:spcPts val="500"/>
+              </a:spcBef>
+              <a:buFont typeface="Arial" panose="020B0604020202020204" pitchFamily="34" charset="0"/>
+              <a:buNone/>
+              <a:defRPr sz="1600" kern="1200">
+                <a:solidFill>
+                  <a:schemeClr val="tx1">
+                    <a:tint val="75000"/>
+                  </a:schemeClr>
+                </a:solidFill>
+                <a:latin typeface="+mn-lt"/>
+                <a:ea typeface="+mn-ea"/>
+                <a:cs typeface="+mn-cs"/>
+              </a:defRPr>
+            </a:lvl9pPr>
+          </a:lstStyle>
+          <a:p>
+            <a:pPr algn="ctr"/>
+            <a:r>
+              <a:rPr lang="en-US" sz="2800" b="1" dirty="0"/>
+              <a:t>ARTS-Lab</a:t>
+            </a:r>
+          </a:p>
+          <a:p>
+            <a:pPr algn="ctr"/>
+            <a:r>
+              <a:rPr lang="en-US" dirty="0"/>
+              <a:t>github.com/Arts-laboratory</a:t>
+            </a:r>
+          </a:p>
+        </p:txBody>
+      </p:sp>
+      <p:sp>
+        <p:nvSpPr>
+          <p:cNvPr id="12" name="Rectangle 11">
+            <a:extLst>
+              <a:ext uri="{FF2B5EF4-FFF2-40B4-BE49-F238E27FC236}">
+                <a16:creationId xmlns:a16="http://schemas.microsoft.com/office/drawing/2014/main" id="{623C047E-AF1D-9A74-599C-148F4F813796}"/>
+              </a:ext>
+            </a:extLst>
+          </p:cNvPr>
+          <p:cNvSpPr/>
+          <p:nvPr/>
+        </p:nvSpPr>
+        <p:spPr>
+          <a:xfrm>
+            <a:off x="3340123" y="2548154"/>
+            <a:ext cx="5511755" cy="1778000"/>
+          </a:xfrm>
+          <a:prstGeom prst="rect">
+            <a:avLst/>
+          </a:prstGeom>
+          <a:noFill/>
+          <a:ln w="57150">
+            <a:solidFill>
+              <a:schemeClr val="bg1"/>
+            </a:solidFill>
+          </a:ln>
+        </p:spPr>
+        <p:style>
+          <a:lnRef idx="2">
+            <a:schemeClr val="accent1">
+              <a:shade val="15000"/>
+            </a:schemeClr>
+          </a:lnRef>
+          <a:fillRef idx="1">
+            <a:schemeClr val="accent1"/>
+          </a:fillRef>
+          <a:effectRef idx="0">
+            <a:schemeClr val="accent1"/>
+          </a:effectRef>
+          <a:fontRef idx="minor">
+            <a:schemeClr val="lt1"/>
+          </a:fontRef>
+        </p:style>
+        <p:txBody>
+          <a:bodyPr rtlCol="0" anchor="ctr"/>
+          <a:lstStyle/>
+          <a:p>
+            <a:pPr algn="ctr"/>
+            <a:endParaRPr lang="en-US"/>
           </a:p>
         </p:txBody>
       </p:sp>
@@ -3321,6 +3667,11 @@
   <p:clrMapOvr>
     <a:masterClrMapping/>
   </p:clrMapOvr>
+  <p:extLst>
+    <p:ext uri="{6950BFC3-D8DA-4A85-94F7-54DA5524770B}">
+      <p188:commentRel xmlns:p188="http://schemas.microsoft.com/office/powerpoint/2018/8/main" r:id="rId2"/>
+    </p:ext>
+  </p:extLst>
 </p:sld>
 </file>
 
